--- a/tests/fixtures/corpus/low-contrast-02.pptx
+++ b/tests/fixtures/corpus/low-contrast-02.pptx
@@ -65,7 +65,7 @@
             <a:r>
               <a:rPr sz="1800" latin="Aptos">
                 <a:solidFill>
-                  <a:srgbClr val="EEEEEE"/>
+                  <a:srgbClr val="F4F4F4"/>
                 </a:solidFill>
               </a:rPr>
               <a:t>Evidence-backed summary</a:t>
